--- a/attached_assets/DealPad_10min_PS_Demo_Lite.pptx
+++ b/attached_assets/DealPad_10min_PS_Demo_Lite.pptx
@@ -3112,7 +3112,7 @@
             <a:avLst/>
           </a:prstGeom>
           <a:solidFill>
-            <a:srgbClr val="0B1F3A"/>
+            <a:srgbClr val="111418"/>
           </a:solidFill>
           <a:ln>
             <a:noFill/>
@@ -3156,7 +3156,7 @@
             <a:avLst/>
           </a:prstGeom>
           <a:solidFill>
-            <a:srgbClr val="6D28D9"/>
+            <a:srgbClr val="F26522"/>
           </a:solidFill>
           <a:ln>
             <a:noFill/>
@@ -3187,137 +3187,20 @@
       </p:sp>
       <p:sp>
         <p:nvSpPr>
-          <p:cNvPr id="4" name="TextBox 3"/>
-          <p:cNvSpPr txBox="1"/>
+          <p:cNvPr id="4" name="Oval 3"/>
+          <p:cNvSpPr/>
           <p:nvPr/>
         </p:nvSpPr>
         <p:spPr>
           <a:xfrm>
             <a:off x="502920" y="548640"/>
-            <a:ext cx="3657600" cy="320040"/>
-          </a:xfrm>
-          <a:prstGeom prst="rect">
-            <a:avLst/>
-          </a:prstGeom>
-          <a:noFill/>
-        </p:spPr>
-        <p:txBody>
-          <a:bodyPr wrap="square" lIns="0" rIns="0" tIns="0" bIns="0" anchor="t">
-            <a:spAutoFit/>
-          </a:bodyPr>
-          <a:lstStyle/>
-          <a:p>
-            <a:pPr algn="l">
-              <a:spcAft>
-                <a:spcPts val="0"/>
-              </a:spcAft>
-            </a:pPr>
-            <a:r>
-              <a:rPr sz="1100" b="1">
-                <a:solidFill>
-                  <a:srgbClr val="C4B5FD"/>
-                </a:solidFill>
-                <a:latin typeface="Calibri"/>
-              </a:rPr>
-              <a:t>ARMANINO LLP</a:t>
-            </a:r>
-          </a:p>
-        </p:txBody>
-      </p:sp>
-      <p:sp>
-        <p:nvSpPr>
-          <p:cNvPr id="5" name="TextBox 4"/>
-          <p:cNvSpPr txBox="1"/>
-          <p:nvPr/>
-        </p:nvSpPr>
-        <p:spPr>
-          <a:xfrm>
-            <a:off x="502920" y="2377440"/>
-            <a:ext cx="3657600" cy="1097280"/>
-          </a:xfrm>
-          <a:prstGeom prst="rect">
-            <a:avLst/>
-          </a:prstGeom>
-          <a:noFill/>
-        </p:spPr>
-        <p:txBody>
-          <a:bodyPr wrap="square" lIns="0" rIns="0" tIns="0" bIns="0" anchor="t">
-            <a:spAutoFit/>
-          </a:bodyPr>
-          <a:lstStyle/>
-          <a:p>
-            <a:pPr algn="l">
-              <a:spcAft>
-                <a:spcPts val="0"/>
-              </a:spcAft>
-            </a:pPr>
-            <a:r>
-              <a:rPr sz="6000" b="1">
-                <a:solidFill>
-                  <a:srgbClr val="FFFFFF"/>
-                </a:solidFill>
-                <a:latin typeface="Calibri"/>
-              </a:rPr>
-              <a:t>DealPad</a:t>
-            </a:r>
-          </a:p>
-        </p:txBody>
-      </p:sp>
-      <p:sp>
-        <p:nvSpPr>
-          <p:cNvPr id="6" name="TextBox 5"/>
-          <p:cNvSpPr txBox="1"/>
-          <p:nvPr/>
-        </p:nvSpPr>
-        <p:spPr>
-          <a:xfrm>
-            <a:off x="502920" y="3383280"/>
-            <a:ext cx="3657600" cy="548640"/>
-          </a:xfrm>
-          <a:prstGeom prst="rect">
-            <a:avLst/>
-          </a:prstGeom>
-          <a:noFill/>
-        </p:spPr>
-        <p:txBody>
-          <a:bodyPr wrap="square" lIns="0" rIns="0" tIns="0" bIns="0" anchor="t">
-            <a:spAutoFit/>
-          </a:bodyPr>
-          <a:lstStyle/>
-          <a:p>
-            <a:pPr algn="l">
-              <a:spcAft>
-                <a:spcPts val="0"/>
-              </a:spcAft>
-            </a:pPr>
-            <a:r>
-              <a:rPr sz="1800" b="0">
-                <a:solidFill>
-                  <a:srgbClr val="E9D5FF"/>
-                </a:solidFill>
-                <a:latin typeface="Calibri"/>
-              </a:rPr>
-              <a:t>Pricing &amp; Scoping 2.0</a:t>
-            </a:r>
-          </a:p>
-        </p:txBody>
-      </p:sp>
-      <p:sp>
-        <p:nvSpPr>
-          <p:cNvPr id="7" name="Rectangle 6"/>
-          <p:cNvSpPr/>
-          <p:nvPr/>
-        </p:nvSpPr>
-        <p:spPr>
-          <a:xfrm>
-            <a:off x="502920" y="4023360"/>
-            <a:ext cx="731520" cy="28575"/>
-          </a:xfrm>
-          <a:prstGeom prst="rect">
+            <a:ext cx="329184" cy="329184"/>
+          </a:xfrm>
+          <a:prstGeom prst="ellipse">
             <a:avLst/>
           </a:prstGeom>
           <a:solidFill>
-            <a:srgbClr val="6D28D9"/>
+            <a:srgbClr val="F26522"/>
           </a:solidFill>
           <a:ln>
             <a:noFill/>
@@ -3348,14 +3231,131 @@
       </p:sp>
       <p:sp>
         <p:nvSpPr>
+          <p:cNvPr id="5" name="TextBox 4"/>
+          <p:cNvSpPr txBox="1"/>
+          <p:nvPr/>
+        </p:nvSpPr>
+        <p:spPr>
+          <a:xfrm>
+            <a:off x="960120" y="548640"/>
+            <a:ext cx="3200400" cy="329184"/>
+          </a:xfrm>
+          <a:prstGeom prst="rect">
+            <a:avLst/>
+          </a:prstGeom>
+          <a:noFill/>
+        </p:spPr>
+        <p:txBody>
+          <a:bodyPr wrap="square" lIns="0" rIns="0" tIns="0" bIns="0" anchor="ctr">
+            <a:spAutoFit/>
+          </a:bodyPr>
+          <a:lstStyle/>
+          <a:p>
+            <a:pPr algn="l">
+              <a:spcAft>
+                <a:spcPts val="0"/>
+              </a:spcAft>
+            </a:pPr>
+            <a:r>
+              <a:rPr sz="1200" b="1">
+                <a:solidFill>
+                  <a:srgbClr val="FFFFFF"/>
+                </a:solidFill>
+                <a:latin typeface="Calibri"/>
+              </a:rPr>
+              <a:t>ALTIMETRIK</a:t>
+            </a:r>
+          </a:p>
+        </p:txBody>
+      </p:sp>
+      <p:sp>
+        <p:nvSpPr>
+          <p:cNvPr id="6" name="TextBox 5"/>
+          <p:cNvSpPr txBox="1"/>
+          <p:nvPr/>
+        </p:nvSpPr>
+        <p:spPr>
+          <a:xfrm>
+            <a:off x="502920" y="1051560"/>
+            <a:ext cx="3657600" cy="320040"/>
+          </a:xfrm>
+          <a:prstGeom prst="rect">
+            <a:avLst/>
+          </a:prstGeom>
+          <a:noFill/>
+        </p:spPr>
+        <p:txBody>
+          <a:bodyPr wrap="square" lIns="0" rIns="0" tIns="0" bIns="0" anchor="t">
+            <a:spAutoFit/>
+          </a:bodyPr>
+          <a:lstStyle/>
+          <a:p>
+            <a:pPr algn="l">
+              <a:spcAft>
+                <a:spcPts val="0"/>
+              </a:spcAft>
+            </a:pPr>
+            <a:r>
+              <a:rPr sz="1000" b="0">
+                <a:solidFill>
+                  <a:srgbClr val="FFD9B8"/>
+                </a:solidFill>
+                <a:latin typeface="Calibri"/>
+              </a:rPr>
+              <a:t>for Armanino LLP</a:t>
+            </a:r>
+          </a:p>
+        </p:txBody>
+      </p:sp>
+      <p:sp>
+        <p:nvSpPr>
+          <p:cNvPr id="7" name="TextBox 6"/>
+          <p:cNvSpPr txBox="1"/>
+          <p:nvPr/>
+        </p:nvSpPr>
+        <p:spPr>
+          <a:xfrm>
+            <a:off x="502920" y="2377440"/>
+            <a:ext cx="3657600" cy="1097280"/>
+          </a:xfrm>
+          <a:prstGeom prst="rect">
+            <a:avLst/>
+          </a:prstGeom>
+          <a:noFill/>
+        </p:spPr>
+        <p:txBody>
+          <a:bodyPr wrap="square" lIns="0" rIns="0" tIns="0" bIns="0" anchor="t">
+            <a:spAutoFit/>
+          </a:bodyPr>
+          <a:lstStyle/>
+          <a:p>
+            <a:pPr algn="l">
+              <a:spcAft>
+                <a:spcPts val="0"/>
+              </a:spcAft>
+            </a:pPr>
+            <a:r>
+              <a:rPr sz="6000" b="1">
+                <a:solidFill>
+                  <a:srgbClr val="FFFFFF"/>
+                </a:solidFill>
+                <a:latin typeface="Calibri"/>
+              </a:rPr>
+              <a:t>DealPad</a:t>
+            </a:r>
+          </a:p>
+        </p:txBody>
+      </p:sp>
+      <p:sp>
+        <p:nvSpPr>
           <p:cNvPr id="8" name="TextBox 7"/>
           <p:cNvSpPr txBox="1"/>
           <p:nvPr/>
         </p:nvSpPr>
         <p:spPr>
           <a:xfrm>
-            <a:off x="502920" y="4160520"/>
-            <a:ext cx="3657600" cy="457200"/>
+            <a:off x="502920" y="3383280"/>
+            <a:ext cx="3657600" cy="548640"/>
           </a:xfrm>
           <a:prstGeom prst="rect">
             <a:avLst/>
@@ -3374,157 +3374,36 @@
               </a:spcAft>
             </a:pPr>
             <a:r>
-              <a:rPr sz="1500" b="0">
-                <a:solidFill>
-                  <a:srgbClr val="FFFFFF"/>
-                </a:solidFill>
-                <a:latin typeface="Calibri"/>
-              </a:rPr>
-              <a:t>10-min stakeholder demo</a:t>
-            </a:r>
-          </a:p>
-        </p:txBody>
-      </p:sp>
-      <p:sp>
-        <p:nvSpPr>
-          <p:cNvPr id="9" name="TextBox 8"/>
-          <p:cNvSpPr txBox="1"/>
-          <p:nvPr/>
-        </p:nvSpPr>
-        <p:spPr>
-          <a:xfrm>
-            <a:off x="502920" y="4526280"/>
-            <a:ext cx="3657600" cy="457200"/>
-          </a:xfrm>
-          <a:prstGeom prst="rect">
-            <a:avLst/>
-          </a:prstGeom>
-          <a:noFill/>
-        </p:spPr>
-        <p:txBody>
-          <a:bodyPr wrap="square" lIns="0" rIns="0" tIns="0" bIns="0" anchor="t">
-            <a:spAutoFit/>
-          </a:bodyPr>
-          <a:lstStyle/>
-          <a:p>
-            <a:pPr algn="l">
-              <a:spcAft>
-                <a:spcPts val="0"/>
-              </a:spcAft>
-            </a:pPr>
-            <a:r>
-              <a:rPr sz="1200" b="0">
-                <a:solidFill>
-                  <a:srgbClr val="C4B5FD"/>
-                </a:solidFill>
-                <a:latin typeface="Calibri"/>
-              </a:rPr>
-              <a:t>Product &amp; Solutioning</a:t>
-            </a:r>
-          </a:p>
-        </p:txBody>
-      </p:sp>
-      <p:sp>
-        <p:nvSpPr>
-          <p:cNvPr id="10" name="TextBox 9"/>
-          <p:cNvSpPr txBox="1"/>
-          <p:nvPr/>
-        </p:nvSpPr>
-        <p:spPr>
-          <a:xfrm>
-            <a:off x="4663440" y="1828800"/>
-            <a:ext cx="6949440" cy="411480"/>
-          </a:xfrm>
-          <a:prstGeom prst="rect">
-            <a:avLst/>
-          </a:prstGeom>
-          <a:noFill/>
-        </p:spPr>
-        <p:txBody>
-          <a:bodyPr wrap="square" lIns="0" rIns="0" tIns="0" bIns="0" anchor="t">
-            <a:spAutoFit/>
-          </a:bodyPr>
-          <a:lstStyle/>
-          <a:p>
-            <a:pPr algn="l">
-              <a:spcAft>
-                <a:spcPts val="0"/>
-              </a:spcAft>
-            </a:pPr>
-            <a:r>
-              <a:rPr sz="1100" b="1">
-                <a:solidFill>
-                  <a:srgbClr val="6D28D9"/>
-                </a:solidFill>
-                <a:latin typeface="Calibri"/>
-              </a:rPr>
-              <a:t>WHAT WE'LL SHOW</a:t>
-            </a:r>
-          </a:p>
-        </p:txBody>
-      </p:sp>
-      <p:sp>
-        <p:nvSpPr>
-          <p:cNvPr id="11" name="TextBox 10"/>
-          <p:cNvSpPr txBox="1"/>
-          <p:nvPr/>
-        </p:nvSpPr>
-        <p:spPr>
-          <a:xfrm>
-            <a:off x="4663440" y="2194560"/>
-            <a:ext cx="6949440" cy="1828800"/>
-          </a:xfrm>
-          <a:prstGeom prst="rect">
-            <a:avLst/>
-          </a:prstGeom>
-          <a:noFill/>
-        </p:spPr>
-        <p:txBody>
-          <a:bodyPr wrap="square" lIns="0" rIns="0" tIns="0" bIns="0" anchor="t">
-            <a:spAutoFit/>
-          </a:bodyPr>
-          <a:lstStyle/>
-          <a:p>
-            <a:pPr algn="l">
-              <a:spcAft>
-                <a:spcPts val="0"/>
-              </a:spcAft>
-            </a:pPr>
-            <a:r>
-              <a:rPr sz="2200" b="0">
-                <a:solidFill>
-                  <a:srgbClr val="1F2937"/>
-                </a:solidFill>
-                <a:latin typeface="Calibri"/>
-              </a:rPr>
-              <a:t>A working pricing platform — intake to approval to outbound — built for the way Armanino actually sells.</a:t>
-            </a:r>
-          </a:p>
-        </p:txBody>
-      </p:sp>
-      <p:sp>
-        <p:nvSpPr>
-          <p:cNvPr id="12" name="Rounded Rectangle 11"/>
+              <a:rPr sz="1800" b="0">
+                <a:solidFill>
+                  <a:srgbClr val="FFD9B8"/>
+                </a:solidFill>
+                <a:latin typeface="Calibri"/>
+              </a:rPr>
+              <a:t>Pricing &amp; Scoping 2.0</a:t>
+            </a:r>
+          </a:p>
+        </p:txBody>
+      </p:sp>
+      <p:sp>
+        <p:nvSpPr>
+          <p:cNvPr id="9" name="Rectangle 8"/>
           <p:cNvSpPr/>
           <p:nvPr/>
         </p:nvSpPr>
         <p:spPr>
           <a:xfrm>
-            <a:off x="4663440" y="4572000"/>
-            <a:ext cx="2286000" cy="1554480"/>
-          </a:xfrm>
-          <a:prstGeom prst="roundRect">
-            <a:avLst>
-              <a:gd name="adj" fmla="val 8000"/>
-            </a:avLst>
+            <a:off x="502920" y="4023360"/>
+            <a:ext cx="731520" cy="28575"/>
+          </a:xfrm>
+          <a:prstGeom prst="rect">
+            <a:avLst/>
           </a:prstGeom>
           <a:solidFill>
-            <a:srgbClr val="F7F9FC"/>
+            <a:srgbClr val="F26522"/>
           </a:solidFill>
           <a:ln>
-            <a:solidFill>
-              <a:srgbClr val="E2E8F0"/>
-            </a:solidFill>
+            <a:noFill/>
           </a:ln>
           <a:effectLst/>
         </p:spPr>
@@ -3552,7 +3431,211 @@
       </p:sp>
       <p:sp>
         <p:nvSpPr>
-          <p:cNvPr id="13" name="Rectangle 12"/>
+          <p:cNvPr id="10" name="TextBox 9"/>
+          <p:cNvSpPr txBox="1"/>
+          <p:nvPr/>
+        </p:nvSpPr>
+        <p:spPr>
+          <a:xfrm>
+            <a:off x="502920" y="4160520"/>
+            <a:ext cx="3657600" cy="457200"/>
+          </a:xfrm>
+          <a:prstGeom prst="rect">
+            <a:avLst/>
+          </a:prstGeom>
+          <a:noFill/>
+        </p:spPr>
+        <p:txBody>
+          <a:bodyPr wrap="square" lIns="0" rIns="0" tIns="0" bIns="0" anchor="t">
+            <a:spAutoFit/>
+          </a:bodyPr>
+          <a:lstStyle/>
+          <a:p>
+            <a:pPr algn="l">
+              <a:spcAft>
+                <a:spcPts val="0"/>
+              </a:spcAft>
+            </a:pPr>
+            <a:r>
+              <a:rPr sz="1500" b="0">
+                <a:solidFill>
+                  <a:srgbClr val="FFFFFF"/>
+                </a:solidFill>
+                <a:latin typeface="Calibri"/>
+              </a:rPr>
+              <a:t>10-min stakeholder demo</a:t>
+            </a:r>
+          </a:p>
+        </p:txBody>
+      </p:sp>
+      <p:sp>
+        <p:nvSpPr>
+          <p:cNvPr id="11" name="TextBox 10"/>
+          <p:cNvSpPr txBox="1"/>
+          <p:nvPr/>
+        </p:nvSpPr>
+        <p:spPr>
+          <a:xfrm>
+            <a:off x="502920" y="4526280"/>
+            <a:ext cx="3657600" cy="457200"/>
+          </a:xfrm>
+          <a:prstGeom prst="rect">
+            <a:avLst/>
+          </a:prstGeom>
+          <a:noFill/>
+        </p:spPr>
+        <p:txBody>
+          <a:bodyPr wrap="square" lIns="0" rIns="0" tIns="0" bIns="0" anchor="t">
+            <a:spAutoFit/>
+          </a:bodyPr>
+          <a:lstStyle/>
+          <a:p>
+            <a:pPr algn="l">
+              <a:spcAft>
+                <a:spcPts val="0"/>
+              </a:spcAft>
+            </a:pPr>
+            <a:r>
+              <a:rPr sz="1200" b="0">
+                <a:solidFill>
+                  <a:srgbClr val="FFC299"/>
+                </a:solidFill>
+                <a:latin typeface="Calibri"/>
+              </a:rPr>
+              <a:t>Product &amp; Solutioning</a:t>
+            </a:r>
+          </a:p>
+        </p:txBody>
+      </p:sp>
+      <p:sp>
+        <p:nvSpPr>
+          <p:cNvPr id="12" name="TextBox 11"/>
+          <p:cNvSpPr txBox="1"/>
+          <p:nvPr/>
+        </p:nvSpPr>
+        <p:spPr>
+          <a:xfrm>
+            <a:off x="4663440" y="1828800"/>
+            <a:ext cx="6949440" cy="411480"/>
+          </a:xfrm>
+          <a:prstGeom prst="rect">
+            <a:avLst/>
+          </a:prstGeom>
+          <a:noFill/>
+        </p:spPr>
+        <p:txBody>
+          <a:bodyPr wrap="square" lIns="0" rIns="0" tIns="0" bIns="0" anchor="t">
+            <a:spAutoFit/>
+          </a:bodyPr>
+          <a:lstStyle/>
+          <a:p>
+            <a:pPr algn="l">
+              <a:spcAft>
+                <a:spcPts val="0"/>
+              </a:spcAft>
+            </a:pPr>
+            <a:r>
+              <a:rPr sz="1100" b="1">
+                <a:solidFill>
+                  <a:srgbClr val="F26522"/>
+                </a:solidFill>
+                <a:latin typeface="Calibri"/>
+              </a:rPr>
+              <a:t>WHAT WE'LL SHOW</a:t>
+            </a:r>
+          </a:p>
+        </p:txBody>
+      </p:sp>
+      <p:sp>
+        <p:nvSpPr>
+          <p:cNvPr id="13" name="TextBox 12"/>
+          <p:cNvSpPr txBox="1"/>
+          <p:nvPr/>
+        </p:nvSpPr>
+        <p:spPr>
+          <a:xfrm>
+            <a:off x="4663440" y="2194560"/>
+            <a:ext cx="6949440" cy="1828800"/>
+          </a:xfrm>
+          <a:prstGeom prst="rect">
+            <a:avLst/>
+          </a:prstGeom>
+          <a:noFill/>
+        </p:spPr>
+        <p:txBody>
+          <a:bodyPr wrap="square" lIns="0" rIns="0" tIns="0" bIns="0" anchor="t">
+            <a:spAutoFit/>
+          </a:bodyPr>
+          <a:lstStyle/>
+          <a:p>
+            <a:pPr algn="l">
+              <a:spcAft>
+                <a:spcPts val="0"/>
+              </a:spcAft>
+            </a:pPr>
+            <a:r>
+              <a:rPr sz="2200" b="0">
+                <a:solidFill>
+                  <a:srgbClr val="1F242C"/>
+                </a:solidFill>
+                <a:latin typeface="Calibri"/>
+              </a:rPr>
+              <a:t>A working pricing platform — intake to approval to outbound — built for the way Armanino actually sells.</a:t>
+            </a:r>
+          </a:p>
+        </p:txBody>
+      </p:sp>
+      <p:sp>
+        <p:nvSpPr>
+          <p:cNvPr id="14" name="Rounded Rectangle 13"/>
+          <p:cNvSpPr/>
+          <p:nvPr/>
+        </p:nvSpPr>
+        <p:spPr>
+          <a:xfrm>
+            <a:off x="4663440" y="4572000"/>
+            <a:ext cx="2286000" cy="1554480"/>
+          </a:xfrm>
+          <a:prstGeom prst="roundRect">
+            <a:avLst>
+              <a:gd name="adj" fmla="val 8000"/>
+            </a:avLst>
+          </a:prstGeom>
+          <a:solidFill>
+            <a:srgbClr val="F7F7F8"/>
+          </a:solidFill>
+          <a:ln>
+            <a:solidFill>
+              <a:srgbClr val="E3E6EB"/>
+            </a:solidFill>
+          </a:ln>
+          <a:effectLst/>
+        </p:spPr>
+        <p:style>
+          <a:lnRef idx="1">
+            <a:schemeClr val="accent1"/>
+          </a:lnRef>
+          <a:fillRef idx="3">
+            <a:schemeClr val="accent1"/>
+          </a:fillRef>
+          <a:effectRef idx="2">
+            <a:schemeClr val="accent1"/>
+          </a:effectRef>
+          <a:fontRef idx="minor">
+            <a:schemeClr val="lt1"/>
+          </a:fontRef>
+        </p:style>
+        <p:txBody>
+          <a:bodyPr rtlCol="0" anchor="ctr"/>
+          <a:lstStyle/>
+          <a:p>
+            <a:pPr algn="ctr"/>
+          </a:p>
+        </p:txBody>
+      </p:sp>
+      <p:sp>
+        <p:nvSpPr>
+          <p:cNvPr id="15" name="Rectangle 14"/>
           <p:cNvSpPr/>
           <p:nvPr/>
         </p:nvSpPr>
@@ -3565,7 +3648,7 @@
             <a:avLst/>
           </a:prstGeom>
           <a:solidFill>
-            <a:srgbClr val="6D28D9"/>
+            <a:srgbClr val="F26522"/>
           </a:solidFill>
           <a:ln>
             <a:noFill/>
@@ -3596,7 +3679,7 @@
       </p:sp>
       <p:sp>
         <p:nvSpPr>
-          <p:cNvPr id="14" name="TextBox 13"/>
+          <p:cNvPr id="16" name="TextBox 15"/>
           <p:cNvSpPr txBox="1"/>
           <p:nvPr/>
         </p:nvSpPr>
@@ -3624,7 +3707,7 @@
             <a:r>
               <a:rPr sz="1400" b="1">
                 <a:solidFill>
-                  <a:srgbClr val="0B1F3A"/>
+                  <a:srgbClr val="111418"/>
                 </a:solidFill>
                 <a:latin typeface="Calibri"/>
               </a:rPr>
@@ -3635,7 +3718,7 @@
       </p:sp>
       <p:sp>
         <p:nvSpPr>
-          <p:cNvPr id="15" name="TextBox 14"/>
+          <p:cNvPr id="17" name="TextBox 16"/>
           <p:cNvSpPr txBox="1"/>
           <p:nvPr/>
         </p:nvSpPr>
@@ -3674,7 +3757,7 @@
       </p:sp>
       <p:sp>
         <p:nvSpPr>
-          <p:cNvPr id="16" name="Rounded Rectangle 15"/>
+          <p:cNvPr id="18" name="Rounded Rectangle 17"/>
           <p:cNvSpPr/>
           <p:nvPr/>
         </p:nvSpPr>
@@ -3689,11 +3772,11 @@
             </a:avLst>
           </a:prstGeom>
           <a:solidFill>
-            <a:srgbClr val="F7F9FC"/>
+            <a:srgbClr val="F7F7F8"/>
           </a:solidFill>
           <a:ln>
             <a:solidFill>
-              <a:srgbClr val="E2E8F0"/>
+              <a:srgbClr val="E3E6EB"/>
             </a:solidFill>
           </a:ln>
           <a:effectLst/>
@@ -3722,7 +3805,7 @@
       </p:sp>
       <p:sp>
         <p:nvSpPr>
-          <p:cNvPr id="17" name="Rectangle 16"/>
+          <p:cNvPr id="19" name="Rectangle 18"/>
           <p:cNvSpPr/>
           <p:nvPr/>
         </p:nvSpPr>
@@ -3735,7 +3818,7 @@
             <a:avLst/>
           </a:prstGeom>
           <a:solidFill>
-            <a:srgbClr val="6D28D9"/>
+            <a:srgbClr val="F26522"/>
           </a:solidFill>
           <a:ln>
             <a:noFill/>
@@ -3766,7 +3849,7 @@
       </p:sp>
       <p:sp>
         <p:nvSpPr>
-          <p:cNvPr id="18" name="TextBox 17"/>
+          <p:cNvPr id="20" name="TextBox 19"/>
           <p:cNvSpPr txBox="1"/>
           <p:nvPr/>
         </p:nvSpPr>
@@ -3794,7 +3877,7 @@
             <a:r>
               <a:rPr sz="1400" b="1">
                 <a:solidFill>
-                  <a:srgbClr val="0B1F3A"/>
+                  <a:srgbClr val="111418"/>
                 </a:solidFill>
                 <a:latin typeface="Calibri"/>
               </a:rPr>
@@ -3805,7 +3888,7 @@
       </p:sp>
       <p:sp>
         <p:nvSpPr>
-          <p:cNvPr id="19" name="TextBox 18"/>
+          <p:cNvPr id="21" name="TextBox 20"/>
           <p:cNvSpPr txBox="1"/>
           <p:nvPr/>
         </p:nvSpPr>
@@ -3844,7 +3927,7 @@
       </p:sp>
       <p:sp>
         <p:nvSpPr>
-          <p:cNvPr id="20" name="Rounded Rectangle 19"/>
+          <p:cNvPr id="22" name="Rounded Rectangle 21"/>
           <p:cNvSpPr/>
           <p:nvPr/>
         </p:nvSpPr>
@@ -3859,11 +3942,11 @@
             </a:avLst>
           </a:prstGeom>
           <a:solidFill>
-            <a:srgbClr val="F7F9FC"/>
+            <a:srgbClr val="F7F7F8"/>
           </a:solidFill>
           <a:ln>
             <a:solidFill>
-              <a:srgbClr val="E2E8F0"/>
+              <a:srgbClr val="E3E6EB"/>
             </a:solidFill>
           </a:ln>
           <a:effectLst/>
@@ -3892,7 +3975,7 @@
       </p:sp>
       <p:sp>
         <p:nvSpPr>
-          <p:cNvPr id="21" name="Rectangle 20"/>
+          <p:cNvPr id="23" name="Rectangle 22"/>
           <p:cNvSpPr/>
           <p:nvPr/>
         </p:nvSpPr>
@@ -3905,7 +3988,7 @@
             <a:avLst/>
           </a:prstGeom>
           <a:solidFill>
-            <a:srgbClr val="6D28D9"/>
+            <a:srgbClr val="F26522"/>
           </a:solidFill>
           <a:ln>
             <a:noFill/>
@@ -3936,7 +4019,7 @@
       </p:sp>
       <p:sp>
         <p:nvSpPr>
-          <p:cNvPr id="22" name="TextBox 21"/>
+          <p:cNvPr id="24" name="TextBox 23"/>
           <p:cNvSpPr txBox="1"/>
           <p:nvPr/>
         </p:nvSpPr>
@@ -3964,7 +4047,7 @@
             <a:r>
               <a:rPr sz="1400" b="1">
                 <a:solidFill>
-                  <a:srgbClr val="0B1F3A"/>
+                  <a:srgbClr val="111418"/>
                 </a:solidFill>
                 <a:latin typeface="Calibri"/>
               </a:rPr>
@@ -3975,7 +4058,7 @@
       </p:sp>
       <p:sp>
         <p:nvSpPr>
-          <p:cNvPr id="23" name="TextBox 22"/>
+          <p:cNvPr id="25" name="TextBox 24"/>
           <p:cNvSpPr txBox="1"/>
           <p:nvPr/>
         </p:nvSpPr>
@@ -4045,7 +4128,7 @@
             <a:avLst/>
           </a:prstGeom>
           <a:solidFill>
-            <a:srgbClr val="6D28D9"/>
+            <a:srgbClr val="F26522"/>
           </a:solidFill>
           <a:ln>
             <a:noFill/>
@@ -4104,7 +4187,7 @@
             <a:r>
               <a:rPr sz="1000" b="1">
                 <a:solidFill>
-                  <a:srgbClr val="6D28D9"/>
+                  <a:srgbClr val="F26522"/>
                 </a:solidFill>
                 <a:latin typeface="Calibri"/>
               </a:rPr>
@@ -4143,7 +4226,7 @@
             <a:r>
               <a:rPr sz="2800" b="1">
                 <a:solidFill>
-                  <a:srgbClr val="0B1F3A"/>
+                  <a:srgbClr val="111418"/>
                 </a:solidFill>
                 <a:latin typeface="Calibri"/>
               </a:rPr>
@@ -4167,7 +4250,7 @@
             <a:avLst/>
           </a:prstGeom>
           <a:solidFill>
-            <a:srgbClr val="0B1F3A"/>
+            <a:srgbClr val="111418"/>
           </a:solidFill>
           <a:ln>
             <a:noFill/>
@@ -4289,7 +4372,7 @@
             <a:avLst/>
           </a:prstGeom>
           <a:solidFill>
-            <a:srgbClr val="6D28D9"/>
+            <a:srgbClr val="F26522"/>
           </a:solidFill>
           <a:ln>
             <a:noFill/>
@@ -4387,7 +4470,7 @@
             <a:r>
               <a:rPr sz="2200" b="1">
                 <a:solidFill>
-                  <a:srgbClr val="0B1F3A"/>
+                  <a:srgbClr val="111418"/>
                 </a:solidFill>
                 <a:latin typeface="Calibri"/>
               </a:rPr>
@@ -4450,7 +4533,7 @@
             <a:avLst/>
           </a:prstGeom>
           <a:solidFill>
-            <a:srgbClr val="6D28D9"/>
+            <a:srgbClr val="F26522"/>
           </a:solidFill>
           <a:ln>
             <a:noFill/>
@@ -4548,7 +4631,7 @@
             <a:r>
               <a:rPr sz="2200" b="1">
                 <a:solidFill>
-                  <a:srgbClr val="0B1F3A"/>
+                  <a:srgbClr val="111418"/>
                 </a:solidFill>
                 <a:latin typeface="Calibri"/>
               </a:rPr>
@@ -4611,7 +4694,7 @@
             <a:avLst/>
           </a:prstGeom>
           <a:solidFill>
-            <a:srgbClr val="6D28D9"/>
+            <a:srgbClr val="F26522"/>
           </a:solidFill>
           <a:ln>
             <a:noFill/>
@@ -4709,7 +4792,7 @@
             <a:r>
               <a:rPr sz="2200" b="1">
                 <a:solidFill>
-                  <a:srgbClr val="0B1F3A"/>
+                  <a:srgbClr val="111418"/>
                 </a:solidFill>
                 <a:latin typeface="Calibri"/>
               </a:rPr>
@@ -4790,7 +4873,7 @@
             <a:avLst/>
           </a:prstGeom>
           <a:solidFill>
-            <a:srgbClr val="6D28D9"/>
+            <a:srgbClr val="F26522"/>
           </a:solidFill>
           <a:ln>
             <a:noFill/>
@@ -4849,7 +4932,7 @@
             <a:r>
               <a:rPr sz="1000" b="1">
                 <a:solidFill>
-                  <a:srgbClr val="6D28D9"/>
+                  <a:srgbClr val="F26522"/>
                 </a:solidFill>
                 <a:latin typeface="Calibri"/>
               </a:rPr>
@@ -4888,7 +4971,7 @@
             <a:r>
               <a:rPr sz="2800" b="1">
                 <a:solidFill>
-                  <a:srgbClr val="0B1F3A"/>
+                  <a:srgbClr val="111418"/>
                 </a:solidFill>
                 <a:latin typeface="Calibri"/>
               </a:rPr>
@@ -4912,7 +4995,7 @@
             <a:avLst/>
           </a:prstGeom>
           <a:solidFill>
-            <a:srgbClr val="0B1F3A"/>
+            <a:srgbClr val="111418"/>
           </a:solidFill>
           <a:ln>
             <a:noFill/>
@@ -5036,11 +5119,11 @@
             </a:avLst>
           </a:prstGeom>
           <a:solidFill>
-            <a:srgbClr val="F7F9FC"/>
+            <a:srgbClr val="F7F7F8"/>
           </a:solidFill>
           <a:ln>
             <a:solidFill>
-              <a:srgbClr val="E2E8F0"/>
+              <a:srgbClr val="E3E6EB"/>
             </a:solidFill>
           </a:ln>
           <a:effectLst/>
@@ -5097,7 +5180,7 @@
             <a:r>
               <a:rPr sz="1800" b="1">
                 <a:solidFill>
-                  <a:srgbClr val="0B1F3A"/>
+                  <a:srgbClr val="111418"/>
                 </a:solidFill>
                 <a:latin typeface="Calibri"/>
               </a:rPr>
@@ -5139,7 +5222,7 @@
             <a:r>
               <a:rPr sz="1600" b="1">
                 <a:solidFill>
-                  <a:srgbClr val="6D28D9"/>
+                  <a:srgbClr val="F26522"/>
                 </a:solidFill>
                 <a:latin typeface="Calibri"/>
               </a:rPr>
@@ -5148,7 +5231,7 @@
             <a:r>
               <a:rPr sz="1600">
                 <a:solidFill>
-                  <a:srgbClr val="1F2937"/>
+                  <a:srgbClr val="1F242C"/>
                 </a:solidFill>
                 <a:latin typeface="Calibri"/>
               </a:rPr>
@@ -5167,7 +5250,7 @@
             <a:r>
               <a:rPr sz="1600" b="1">
                 <a:solidFill>
-                  <a:srgbClr val="6D28D9"/>
+                  <a:srgbClr val="F26522"/>
                 </a:solidFill>
                 <a:latin typeface="Calibri"/>
               </a:rPr>
@@ -5176,7 +5259,7 @@
             <a:r>
               <a:rPr sz="1600">
                 <a:solidFill>
-                  <a:srgbClr val="1F2937"/>
+                  <a:srgbClr val="1F242C"/>
                 </a:solidFill>
                 <a:latin typeface="Calibri"/>
               </a:rPr>
@@ -5195,7 +5278,7 @@
             <a:r>
               <a:rPr sz="1600" b="1">
                 <a:solidFill>
-                  <a:srgbClr val="6D28D9"/>
+                  <a:srgbClr val="F26522"/>
                 </a:solidFill>
                 <a:latin typeface="Calibri"/>
               </a:rPr>
@@ -5204,7 +5287,7 @@
             <a:r>
               <a:rPr sz="1600">
                 <a:solidFill>
-                  <a:srgbClr val="1F2937"/>
+                  <a:srgbClr val="1F242C"/>
                 </a:solidFill>
                 <a:latin typeface="Calibri"/>
               </a:rPr>
@@ -5223,7 +5306,7 @@
             <a:r>
               <a:rPr sz="1600" b="1">
                 <a:solidFill>
-                  <a:srgbClr val="6D28D9"/>
+                  <a:srgbClr val="F26522"/>
                 </a:solidFill>
                 <a:latin typeface="Calibri"/>
               </a:rPr>
@@ -5232,7 +5315,7 @@
             <a:r>
               <a:rPr sz="1600">
                 <a:solidFill>
-                  <a:srgbClr val="1F2937"/>
+                  <a:srgbClr val="1F242C"/>
                 </a:solidFill>
                 <a:latin typeface="Calibri"/>
               </a:rPr>
@@ -5258,11 +5341,11 @@
             </a:avLst>
           </a:prstGeom>
           <a:solidFill>
-            <a:srgbClr val="F7F9FC"/>
+            <a:srgbClr val="F7F7F8"/>
           </a:solidFill>
           <a:ln>
             <a:solidFill>
-              <a:srgbClr val="E2E8F0"/>
+              <a:srgbClr val="E3E6EB"/>
             </a:solidFill>
           </a:ln>
           <a:effectLst/>
@@ -5319,7 +5402,7 @@
             <a:r>
               <a:rPr sz="1800" b="1">
                 <a:solidFill>
-                  <a:srgbClr val="0B1F3A"/>
+                  <a:srgbClr val="111418"/>
                 </a:solidFill>
                 <a:latin typeface="Calibri"/>
               </a:rPr>
@@ -5361,7 +5444,7 @@
             <a:r>
               <a:rPr sz="1600" b="1">
                 <a:solidFill>
-                  <a:srgbClr val="6D28D9"/>
+                  <a:srgbClr val="F26522"/>
                 </a:solidFill>
                 <a:latin typeface="Calibri"/>
               </a:rPr>
@@ -5370,7 +5453,7 @@
             <a:r>
               <a:rPr sz="1600">
                 <a:solidFill>
-                  <a:srgbClr val="1F2937"/>
+                  <a:srgbClr val="1F242C"/>
                 </a:solidFill>
                 <a:latin typeface="Calibri"/>
               </a:rPr>
@@ -5389,7 +5472,7 @@
             <a:r>
               <a:rPr sz="1600" b="1">
                 <a:solidFill>
-                  <a:srgbClr val="6D28D9"/>
+                  <a:srgbClr val="F26522"/>
                 </a:solidFill>
                 <a:latin typeface="Calibri"/>
               </a:rPr>
@@ -5398,7 +5481,7 @@
             <a:r>
               <a:rPr sz="1600">
                 <a:solidFill>
-                  <a:srgbClr val="1F2937"/>
+                  <a:srgbClr val="1F242C"/>
                 </a:solidFill>
                 <a:latin typeface="Calibri"/>
               </a:rPr>
@@ -5417,7 +5500,7 @@
             <a:r>
               <a:rPr sz="1600" b="1">
                 <a:solidFill>
-                  <a:srgbClr val="6D28D9"/>
+                  <a:srgbClr val="F26522"/>
                 </a:solidFill>
                 <a:latin typeface="Calibri"/>
               </a:rPr>
@@ -5426,7 +5509,7 @@
             <a:r>
               <a:rPr sz="1600">
                 <a:solidFill>
-                  <a:srgbClr val="1F2937"/>
+                  <a:srgbClr val="1F242C"/>
                 </a:solidFill>
                 <a:latin typeface="Calibri"/>
               </a:rPr>
@@ -5445,7 +5528,7 @@
             <a:r>
               <a:rPr sz="1600" b="1">
                 <a:solidFill>
-                  <a:srgbClr val="6D28D9"/>
+                  <a:srgbClr val="F26522"/>
                 </a:solidFill>
                 <a:latin typeface="Calibri"/>
               </a:rPr>
@@ -5454,7 +5537,7 @@
             <a:r>
               <a:rPr sz="1600">
                 <a:solidFill>
-                  <a:srgbClr val="1F2937"/>
+                  <a:srgbClr val="1F242C"/>
                 </a:solidFill>
                 <a:latin typeface="Calibri"/>
               </a:rPr>
@@ -5496,7 +5579,7 @@
             <a:avLst/>
           </a:prstGeom>
           <a:solidFill>
-            <a:srgbClr val="6D28D9"/>
+            <a:srgbClr val="F26522"/>
           </a:solidFill>
           <a:ln>
             <a:noFill/>
@@ -5555,7 +5638,7 @@
             <a:r>
               <a:rPr sz="1000" b="1">
                 <a:solidFill>
-                  <a:srgbClr val="6D28D9"/>
+                  <a:srgbClr val="F26522"/>
                 </a:solidFill>
                 <a:latin typeface="Calibri"/>
               </a:rPr>
@@ -5594,7 +5677,7 @@
             <a:r>
               <a:rPr sz="2800" b="1">
                 <a:solidFill>
-                  <a:srgbClr val="0B1F3A"/>
+                  <a:srgbClr val="111418"/>
                 </a:solidFill>
                 <a:latin typeface="Calibri"/>
               </a:rPr>
@@ -5618,7 +5701,7 @@
             <a:avLst/>
           </a:prstGeom>
           <a:solidFill>
-            <a:srgbClr val="0B1F3A"/>
+            <a:srgbClr val="111418"/>
           </a:solidFill>
           <a:ln>
             <a:noFill/>
@@ -5742,11 +5825,11 @@
             </a:avLst>
           </a:prstGeom>
           <a:solidFill>
-            <a:srgbClr val="F7F9FC"/>
+            <a:srgbClr val="F7F7F8"/>
           </a:solidFill>
           <a:ln>
             <a:solidFill>
-              <a:srgbClr val="E2E8F0"/>
+              <a:srgbClr val="E3E6EB"/>
             </a:solidFill>
           </a:ln>
           <a:effectLst/>
@@ -5803,7 +5886,7 @@
             <a:r>
               <a:rPr sz="2200" b="1">
                 <a:solidFill>
-                  <a:srgbClr val="6D28D9"/>
+                  <a:srgbClr val="F26522"/>
                 </a:solidFill>
                 <a:latin typeface="Calibri"/>
               </a:rPr>
@@ -5842,7 +5925,7 @@
             <a:r>
               <a:rPr sz="1600" b="1">
                 <a:solidFill>
-                  <a:srgbClr val="0B1F3A"/>
+                  <a:srgbClr val="111418"/>
                 </a:solidFill>
                 <a:latin typeface="Calibri"/>
               </a:rPr>
@@ -5866,7 +5949,7 @@
             <a:avLst/>
           </a:prstGeom>
           <a:solidFill>
-            <a:srgbClr val="6D28D9"/>
+            <a:srgbClr val="F26522"/>
           </a:solidFill>
           <a:ln>
             <a:noFill/>
@@ -5928,7 +6011,7 @@
             <a:r>
               <a:rPr sz="1300" b="1">
                 <a:solidFill>
-                  <a:srgbClr val="6D28D9"/>
+                  <a:srgbClr val="F26522"/>
                 </a:solidFill>
                 <a:latin typeface="Calibri"/>
               </a:rPr>
@@ -5937,7 +6020,7 @@
             <a:r>
               <a:rPr sz="1300">
                 <a:solidFill>
-                  <a:srgbClr val="1F2937"/>
+                  <a:srgbClr val="1F242C"/>
                 </a:solidFill>
                 <a:latin typeface="Calibri"/>
               </a:rPr>
@@ -5956,7 +6039,7 @@
             <a:r>
               <a:rPr sz="1300" b="1">
                 <a:solidFill>
-                  <a:srgbClr val="6D28D9"/>
+                  <a:srgbClr val="F26522"/>
                 </a:solidFill>
                 <a:latin typeface="Calibri"/>
               </a:rPr>
@@ -5965,7 +6048,7 @@
             <a:r>
               <a:rPr sz="1300">
                 <a:solidFill>
-                  <a:srgbClr val="1F2937"/>
+                  <a:srgbClr val="1F242C"/>
                 </a:solidFill>
                 <a:latin typeface="Calibri"/>
               </a:rPr>
@@ -5984,7 +6067,7 @@
             <a:r>
               <a:rPr sz="1300" b="1">
                 <a:solidFill>
-                  <a:srgbClr val="6D28D9"/>
+                  <a:srgbClr val="F26522"/>
                 </a:solidFill>
                 <a:latin typeface="Calibri"/>
               </a:rPr>
@@ -5993,7 +6076,7 @@
             <a:r>
               <a:rPr sz="1300">
                 <a:solidFill>
-                  <a:srgbClr val="1F2937"/>
+                  <a:srgbClr val="1F242C"/>
                 </a:solidFill>
                 <a:latin typeface="Calibri"/>
               </a:rPr>
@@ -6019,11 +6102,11 @@
             </a:avLst>
           </a:prstGeom>
           <a:solidFill>
-            <a:srgbClr val="F7F9FC"/>
+            <a:srgbClr val="F7F7F8"/>
           </a:solidFill>
           <a:ln>
             <a:solidFill>
-              <a:srgbClr val="E2E8F0"/>
+              <a:srgbClr val="E3E6EB"/>
             </a:solidFill>
           </a:ln>
           <a:effectLst/>
@@ -6080,7 +6163,7 @@
             <a:r>
               <a:rPr sz="2200" b="1">
                 <a:solidFill>
-                  <a:srgbClr val="6D28D9"/>
+                  <a:srgbClr val="F26522"/>
                 </a:solidFill>
                 <a:latin typeface="Calibri"/>
               </a:rPr>
@@ -6119,7 +6202,7 @@
             <a:r>
               <a:rPr sz="1600" b="1">
                 <a:solidFill>
-                  <a:srgbClr val="0B1F3A"/>
+                  <a:srgbClr val="111418"/>
                 </a:solidFill>
                 <a:latin typeface="Calibri"/>
               </a:rPr>
@@ -6143,7 +6226,7 @@
             <a:avLst/>
           </a:prstGeom>
           <a:solidFill>
-            <a:srgbClr val="6D28D9"/>
+            <a:srgbClr val="F26522"/>
           </a:solidFill>
           <a:ln>
             <a:noFill/>
@@ -6205,7 +6288,7 @@
             <a:r>
               <a:rPr sz="1300" b="1">
                 <a:solidFill>
-                  <a:srgbClr val="6D28D9"/>
+                  <a:srgbClr val="F26522"/>
                 </a:solidFill>
                 <a:latin typeface="Calibri"/>
               </a:rPr>
@@ -6214,7 +6297,7 @@
             <a:r>
               <a:rPr sz="1300">
                 <a:solidFill>
-                  <a:srgbClr val="1F2937"/>
+                  <a:srgbClr val="1F242C"/>
                 </a:solidFill>
                 <a:latin typeface="Calibri"/>
               </a:rPr>
@@ -6233,7 +6316,7 @@
             <a:r>
               <a:rPr sz="1300" b="1">
                 <a:solidFill>
-                  <a:srgbClr val="6D28D9"/>
+                  <a:srgbClr val="F26522"/>
                 </a:solidFill>
                 <a:latin typeface="Calibri"/>
               </a:rPr>
@@ -6242,7 +6325,7 @@
             <a:r>
               <a:rPr sz="1300">
                 <a:solidFill>
-                  <a:srgbClr val="1F2937"/>
+                  <a:srgbClr val="1F242C"/>
                 </a:solidFill>
                 <a:latin typeface="Calibri"/>
               </a:rPr>
@@ -6261,7 +6344,7 @@
             <a:r>
               <a:rPr sz="1300" b="1">
                 <a:solidFill>
-                  <a:srgbClr val="6D28D9"/>
+                  <a:srgbClr val="F26522"/>
                 </a:solidFill>
                 <a:latin typeface="Calibri"/>
               </a:rPr>
@@ -6270,7 +6353,7 @@
             <a:r>
               <a:rPr sz="1300">
                 <a:solidFill>
-                  <a:srgbClr val="1F2937"/>
+                  <a:srgbClr val="1F242C"/>
                 </a:solidFill>
                 <a:latin typeface="Calibri"/>
               </a:rPr>
@@ -6296,11 +6379,11 @@
             </a:avLst>
           </a:prstGeom>
           <a:solidFill>
-            <a:srgbClr val="F7F9FC"/>
+            <a:srgbClr val="F7F7F8"/>
           </a:solidFill>
           <a:ln>
             <a:solidFill>
-              <a:srgbClr val="E2E8F0"/>
+              <a:srgbClr val="E3E6EB"/>
             </a:solidFill>
           </a:ln>
           <a:effectLst/>
@@ -6357,7 +6440,7 @@
             <a:r>
               <a:rPr sz="2200" b="1">
                 <a:solidFill>
-                  <a:srgbClr val="6D28D9"/>
+                  <a:srgbClr val="F26522"/>
                 </a:solidFill>
                 <a:latin typeface="Calibri"/>
               </a:rPr>
@@ -6396,7 +6479,7 @@
             <a:r>
               <a:rPr sz="1600" b="1">
                 <a:solidFill>
-                  <a:srgbClr val="0B1F3A"/>
+                  <a:srgbClr val="111418"/>
                 </a:solidFill>
                 <a:latin typeface="Calibri"/>
               </a:rPr>
@@ -6420,7 +6503,7 @@
             <a:avLst/>
           </a:prstGeom>
           <a:solidFill>
-            <a:srgbClr val="6D28D9"/>
+            <a:srgbClr val="F26522"/>
           </a:solidFill>
           <a:ln>
             <a:noFill/>
@@ -6482,7 +6565,7 @@
             <a:r>
               <a:rPr sz="1300" b="1">
                 <a:solidFill>
-                  <a:srgbClr val="6D28D9"/>
+                  <a:srgbClr val="F26522"/>
                 </a:solidFill>
                 <a:latin typeface="Calibri"/>
               </a:rPr>
@@ -6491,7 +6574,7 @@
             <a:r>
               <a:rPr sz="1300">
                 <a:solidFill>
-                  <a:srgbClr val="1F2937"/>
+                  <a:srgbClr val="1F242C"/>
                 </a:solidFill>
                 <a:latin typeface="Calibri"/>
               </a:rPr>
@@ -6510,7 +6593,7 @@
             <a:r>
               <a:rPr sz="1300" b="1">
                 <a:solidFill>
-                  <a:srgbClr val="6D28D9"/>
+                  <a:srgbClr val="F26522"/>
                 </a:solidFill>
                 <a:latin typeface="Calibri"/>
               </a:rPr>
@@ -6519,7 +6602,7 @@
             <a:r>
               <a:rPr sz="1300">
                 <a:solidFill>
-                  <a:srgbClr val="1F2937"/>
+                  <a:srgbClr val="1F242C"/>
                 </a:solidFill>
                 <a:latin typeface="Calibri"/>
               </a:rPr>
@@ -6538,7 +6621,7 @@
             <a:r>
               <a:rPr sz="1300" b="1">
                 <a:solidFill>
-                  <a:srgbClr val="6D28D9"/>
+                  <a:srgbClr val="F26522"/>
                 </a:solidFill>
                 <a:latin typeface="Calibri"/>
               </a:rPr>
@@ -6547,7 +6630,7 @@
             <a:r>
               <a:rPr sz="1300">
                 <a:solidFill>
-                  <a:srgbClr val="1F2937"/>
+                  <a:srgbClr val="1F242C"/>
                 </a:solidFill>
                 <a:latin typeface="Calibri"/>
               </a:rPr>
@@ -6573,11 +6656,11 @@
             </a:avLst>
           </a:prstGeom>
           <a:solidFill>
-            <a:srgbClr val="F7F9FC"/>
+            <a:srgbClr val="F7F7F8"/>
           </a:solidFill>
           <a:ln>
             <a:solidFill>
-              <a:srgbClr val="E2E8F0"/>
+              <a:srgbClr val="E3E6EB"/>
             </a:solidFill>
           </a:ln>
           <a:effectLst/>
@@ -6634,7 +6717,7 @@
             <a:r>
               <a:rPr sz="2200" b="1">
                 <a:solidFill>
-                  <a:srgbClr val="6D28D9"/>
+                  <a:srgbClr val="F26522"/>
                 </a:solidFill>
                 <a:latin typeface="Calibri"/>
               </a:rPr>
@@ -6673,7 +6756,7 @@
             <a:r>
               <a:rPr sz="1600" b="1">
                 <a:solidFill>
-                  <a:srgbClr val="0B1F3A"/>
+                  <a:srgbClr val="111418"/>
                 </a:solidFill>
                 <a:latin typeface="Calibri"/>
               </a:rPr>
@@ -6697,7 +6780,7 @@
             <a:avLst/>
           </a:prstGeom>
           <a:solidFill>
-            <a:srgbClr val="6D28D9"/>
+            <a:srgbClr val="F26522"/>
           </a:solidFill>
           <a:ln>
             <a:noFill/>
@@ -6759,7 +6842,7 @@
             <a:r>
               <a:rPr sz="1300" b="1">
                 <a:solidFill>
-                  <a:srgbClr val="6D28D9"/>
+                  <a:srgbClr val="F26522"/>
                 </a:solidFill>
                 <a:latin typeface="Calibri"/>
               </a:rPr>
@@ -6768,7 +6851,7 @@
             <a:r>
               <a:rPr sz="1300">
                 <a:solidFill>
-                  <a:srgbClr val="1F2937"/>
+                  <a:srgbClr val="1F242C"/>
                 </a:solidFill>
                 <a:latin typeface="Calibri"/>
               </a:rPr>
@@ -6787,7 +6870,7 @@
             <a:r>
               <a:rPr sz="1300" b="1">
                 <a:solidFill>
-                  <a:srgbClr val="6D28D9"/>
+                  <a:srgbClr val="F26522"/>
                 </a:solidFill>
                 <a:latin typeface="Calibri"/>
               </a:rPr>
@@ -6796,7 +6879,7 @@
             <a:r>
               <a:rPr sz="1300">
                 <a:solidFill>
-                  <a:srgbClr val="1F2937"/>
+                  <a:srgbClr val="1F242C"/>
                 </a:solidFill>
                 <a:latin typeface="Calibri"/>
               </a:rPr>
@@ -6815,7 +6898,7 @@
             <a:r>
               <a:rPr sz="1300" b="1">
                 <a:solidFill>
-                  <a:srgbClr val="6D28D9"/>
+                  <a:srgbClr val="F26522"/>
                 </a:solidFill>
                 <a:latin typeface="Calibri"/>
               </a:rPr>
@@ -6824,7 +6907,7 @@
             <a:r>
               <a:rPr sz="1300">
                 <a:solidFill>
-                  <a:srgbClr val="1F2937"/>
+                  <a:srgbClr val="1F242C"/>
                 </a:solidFill>
                 <a:latin typeface="Calibri"/>
               </a:rPr>
@@ -6866,7 +6949,7 @@
             <a:avLst/>
           </a:prstGeom>
           <a:solidFill>
-            <a:srgbClr val="6D28D9"/>
+            <a:srgbClr val="F26522"/>
           </a:solidFill>
           <a:ln>
             <a:noFill/>
@@ -6925,7 +7008,7 @@
             <a:r>
               <a:rPr sz="1000" b="1">
                 <a:solidFill>
-                  <a:srgbClr val="6D28D9"/>
+                  <a:srgbClr val="F26522"/>
                 </a:solidFill>
                 <a:latin typeface="Calibri"/>
               </a:rPr>
@@ -6964,7 +7047,7 @@
             <a:r>
               <a:rPr sz="2800" b="1">
                 <a:solidFill>
-                  <a:srgbClr val="0B1F3A"/>
+                  <a:srgbClr val="111418"/>
                 </a:solidFill>
                 <a:latin typeface="Calibri"/>
               </a:rPr>
@@ -6988,7 +7071,7 @@
             <a:avLst/>
           </a:prstGeom>
           <a:solidFill>
-            <a:srgbClr val="0B1F3A"/>
+            <a:srgbClr val="111418"/>
           </a:solidFill>
           <a:ln>
             <a:noFill/>
@@ -7110,7 +7193,7 @@
             <a:avLst/>
           </a:prstGeom>
           <a:solidFill>
-            <a:srgbClr val="EDE9FE"/>
+            <a:srgbClr val="FFECDF"/>
           </a:solidFill>
           <a:ln>
             <a:noFill/>
@@ -7169,7 +7252,7 @@
             <a:r>
               <a:rPr sz="1200" b="1">
                 <a:solidFill>
-                  <a:srgbClr val="6D28D9"/>
+                  <a:srgbClr val="F26522"/>
                 </a:solidFill>
                 <a:latin typeface="Calibri"/>
               </a:rPr>
@@ -7208,7 +7291,7 @@
             <a:r>
               <a:rPr sz="2000" b="1">
                 <a:solidFill>
-                  <a:srgbClr val="0B1F3A"/>
+                  <a:srgbClr val="111418"/>
                 </a:solidFill>
                 <a:latin typeface="Calibri"/>
               </a:rPr>
@@ -7271,7 +7354,7 @@
             <a:avLst/>
           </a:prstGeom>
           <a:solidFill>
-            <a:srgbClr val="E2E8F0"/>
+            <a:srgbClr val="E3E6EB"/>
           </a:solidFill>
           <a:ln>
             <a:noFill/>
@@ -7315,7 +7398,7 @@
             <a:avLst/>
           </a:prstGeom>
           <a:solidFill>
-            <a:srgbClr val="EDE9FE"/>
+            <a:srgbClr val="FFECDF"/>
           </a:solidFill>
           <a:ln>
             <a:noFill/>
@@ -7374,7 +7457,7 @@
             <a:r>
               <a:rPr sz="1200" b="1">
                 <a:solidFill>
-                  <a:srgbClr val="6D28D9"/>
+                  <a:srgbClr val="F26522"/>
                 </a:solidFill>
                 <a:latin typeface="Calibri"/>
               </a:rPr>
@@ -7413,7 +7496,7 @@
             <a:r>
               <a:rPr sz="2000" b="1">
                 <a:solidFill>
-                  <a:srgbClr val="0B1F3A"/>
+                  <a:srgbClr val="111418"/>
                 </a:solidFill>
                 <a:latin typeface="Calibri"/>
               </a:rPr>
@@ -7476,7 +7559,7 @@
             <a:avLst/>
           </a:prstGeom>
           <a:solidFill>
-            <a:srgbClr val="E2E8F0"/>
+            <a:srgbClr val="E3E6EB"/>
           </a:solidFill>
           <a:ln>
             <a:noFill/>
@@ -7520,7 +7603,7 @@
             <a:avLst/>
           </a:prstGeom>
           <a:solidFill>
-            <a:srgbClr val="EDE9FE"/>
+            <a:srgbClr val="FFECDF"/>
           </a:solidFill>
           <a:ln>
             <a:noFill/>
@@ -7579,7 +7662,7 @@
             <a:r>
               <a:rPr sz="1200" b="1">
                 <a:solidFill>
-                  <a:srgbClr val="6D28D9"/>
+                  <a:srgbClr val="F26522"/>
                 </a:solidFill>
                 <a:latin typeface="Calibri"/>
               </a:rPr>
@@ -7618,7 +7701,7 @@
             <a:r>
               <a:rPr sz="2000" b="1">
                 <a:solidFill>
-                  <a:srgbClr val="0B1F3A"/>
+                  <a:srgbClr val="111418"/>
                 </a:solidFill>
                 <a:latin typeface="Calibri"/>
               </a:rPr>
@@ -7681,7 +7764,7 @@
             <a:avLst/>
           </a:prstGeom>
           <a:solidFill>
-            <a:srgbClr val="E2E8F0"/>
+            <a:srgbClr val="E3E6EB"/>
           </a:solidFill>
           <a:ln>
             <a:noFill/>
@@ -7725,7 +7808,7 @@
             <a:avLst/>
           </a:prstGeom>
           <a:solidFill>
-            <a:srgbClr val="EDE9FE"/>
+            <a:srgbClr val="FFECDF"/>
           </a:solidFill>
           <a:ln>
             <a:noFill/>
@@ -7784,7 +7867,7 @@
             <a:r>
               <a:rPr sz="1200" b="1">
                 <a:solidFill>
-                  <a:srgbClr val="6D28D9"/>
+                  <a:srgbClr val="F26522"/>
                 </a:solidFill>
                 <a:latin typeface="Calibri"/>
               </a:rPr>
@@ -7823,7 +7906,7 @@
             <a:r>
               <a:rPr sz="2000" b="1">
                 <a:solidFill>
-                  <a:srgbClr val="0B1F3A"/>
+                  <a:srgbClr val="111418"/>
                 </a:solidFill>
                 <a:latin typeface="Calibri"/>
               </a:rPr>
@@ -7886,7 +7969,7 @@
             <a:avLst/>
           </a:prstGeom>
           <a:solidFill>
-            <a:srgbClr val="E2E8F0"/>
+            <a:srgbClr val="E3E6EB"/>
           </a:solidFill>
           <a:ln>
             <a:noFill/>
@@ -7948,7 +8031,7 @@
             <a:avLst/>
           </a:prstGeom>
           <a:solidFill>
-            <a:srgbClr val="6D28D9"/>
+            <a:srgbClr val="F26522"/>
           </a:solidFill>
           <a:ln>
             <a:noFill/>
@@ -8007,7 +8090,7 @@
             <a:r>
               <a:rPr sz="1000" b="1">
                 <a:solidFill>
-                  <a:srgbClr val="6D28D9"/>
+                  <a:srgbClr val="F26522"/>
                 </a:solidFill>
                 <a:latin typeface="Calibri"/>
               </a:rPr>
@@ -8046,7 +8129,7 @@
             <a:r>
               <a:rPr sz="2800" b="1">
                 <a:solidFill>
-                  <a:srgbClr val="0B1F3A"/>
+                  <a:srgbClr val="111418"/>
                 </a:solidFill>
                 <a:latin typeface="Calibri"/>
               </a:rPr>
@@ -8070,7 +8153,7 @@
             <a:avLst/>
           </a:prstGeom>
           <a:solidFill>
-            <a:srgbClr val="0B1F3A"/>
+            <a:srgbClr val="111418"/>
           </a:solidFill>
           <a:ln>
             <a:noFill/>
@@ -8207,7 +8290,7 @@
             <a:r>
               <a:rPr sz="2200" b="1">
                 <a:solidFill>
-                  <a:srgbClr val="0B1F3A"/>
+                  <a:srgbClr val="111418"/>
                 </a:solidFill>
                 <a:latin typeface="Calibri"/>
               </a:rPr>
@@ -8249,7 +8332,7 @@
             <a:r>
               <a:rPr sz="1800" b="1">
                 <a:solidFill>
-                  <a:srgbClr val="6D28D9"/>
+                  <a:srgbClr val="F26522"/>
                 </a:solidFill>
                 <a:latin typeface="Calibri"/>
               </a:rPr>
@@ -8258,7 +8341,7 @@
             <a:r>
               <a:rPr sz="1800">
                 <a:solidFill>
-                  <a:srgbClr val="1F2937"/>
+                  <a:srgbClr val="1F242C"/>
                 </a:solidFill>
                 <a:latin typeface="Calibri"/>
               </a:rPr>
@@ -8277,7 +8360,7 @@
             <a:r>
               <a:rPr sz="1800" b="1">
                 <a:solidFill>
-                  <a:srgbClr val="6D28D9"/>
+                  <a:srgbClr val="F26522"/>
                 </a:solidFill>
                 <a:latin typeface="Calibri"/>
               </a:rPr>
@@ -8286,7 +8369,7 @@
             <a:r>
               <a:rPr sz="1800">
                 <a:solidFill>
-                  <a:srgbClr val="1F2937"/>
+                  <a:srgbClr val="1F242C"/>
                 </a:solidFill>
                 <a:latin typeface="Calibri"/>
               </a:rPr>
@@ -8305,7 +8388,7 @@
             <a:r>
               <a:rPr sz="1800" b="1">
                 <a:solidFill>
-                  <a:srgbClr val="6D28D9"/>
+                  <a:srgbClr val="F26522"/>
                 </a:solidFill>
                 <a:latin typeface="Calibri"/>
               </a:rPr>
@@ -8314,7 +8397,7 @@
             <a:r>
               <a:rPr sz="1800">
                 <a:solidFill>
-                  <a:srgbClr val="1F2937"/>
+                  <a:srgbClr val="1F242C"/>
                 </a:solidFill>
                 <a:latin typeface="Calibri"/>
               </a:rPr>
@@ -8333,7 +8416,7 @@
             <a:r>
               <a:rPr sz="1800" b="1">
                 <a:solidFill>
-                  <a:srgbClr val="6D28D9"/>
+                  <a:srgbClr val="F26522"/>
                 </a:solidFill>
                 <a:latin typeface="Calibri"/>
               </a:rPr>
@@ -8342,7 +8425,7 @@
             <a:r>
               <a:rPr sz="1800">
                 <a:solidFill>
-                  <a:srgbClr val="1F2937"/>
+                  <a:srgbClr val="1F242C"/>
                 </a:solidFill>
                 <a:latin typeface="Calibri"/>
               </a:rPr>
@@ -8384,7 +8467,7 @@
             <a:avLst/>
           </a:prstGeom>
           <a:solidFill>
-            <a:srgbClr val="6D28D9"/>
+            <a:srgbClr val="F26522"/>
           </a:solidFill>
           <a:ln>
             <a:noFill/>
@@ -8443,7 +8526,7 @@
             <a:r>
               <a:rPr sz="1000" b="1">
                 <a:solidFill>
-                  <a:srgbClr val="6D28D9"/>
+                  <a:srgbClr val="F26522"/>
                 </a:solidFill>
                 <a:latin typeface="Calibri"/>
               </a:rPr>
@@ -8482,7 +8565,7 @@
             <a:r>
               <a:rPr sz="2800" b="1">
                 <a:solidFill>
-                  <a:srgbClr val="0B1F3A"/>
+                  <a:srgbClr val="111418"/>
                 </a:solidFill>
                 <a:latin typeface="Calibri"/>
               </a:rPr>
@@ -8506,7 +8589,7 @@
             <a:avLst/>
           </a:prstGeom>
           <a:solidFill>
-            <a:srgbClr val="0B1F3A"/>
+            <a:srgbClr val="111418"/>
           </a:solidFill>
           <a:ln>
             <a:noFill/>
@@ -8643,7 +8726,7 @@
             <a:r>
               <a:rPr sz="2200" b="1">
                 <a:solidFill>
-                  <a:srgbClr val="0B1F3A"/>
+                  <a:srgbClr val="111418"/>
                 </a:solidFill>
                 <a:latin typeface="Calibri"/>
               </a:rPr>
@@ -8685,7 +8768,7 @@
             <a:r>
               <a:rPr sz="1800" b="1">
                 <a:solidFill>
-                  <a:srgbClr val="6D28D9"/>
+                  <a:srgbClr val="F26522"/>
                 </a:solidFill>
                 <a:latin typeface="Calibri"/>
               </a:rPr>
@@ -8694,7 +8777,7 @@
             <a:r>
               <a:rPr sz="1800">
                 <a:solidFill>
-                  <a:srgbClr val="1F2937"/>
+                  <a:srgbClr val="1F242C"/>
                 </a:solidFill>
                 <a:latin typeface="Calibri"/>
               </a:rPr>
@@ -8713,7 +8796,7 @@
             <a:r>
               <a:rPr sz="1800" b="1">
                 <a:solidFill>
-                  <a:srgbClr val="6D28D9"/>
+                  <a:srgbClr val="F26522"/>
                 </a:solidFill>
                 <a:latin typeface="Calibri"/>
               </a:rPr>
@@ -8722,7 +8805,7 @@
             <a:r>
               <a:rPr sz="1800">
                 <a:solidFill>
-                  <a:srgbClr val="1F2937"/>
+                  <a:srgbClr val="1F242C"/>
                 </a:solidFill>
                 <a:latin typeface="Calibri"/>
               </a:rPr>
@@ -8741,7 +8824,7 @@
             <a:r>
               <a:rPr sz="1800" b="1">
                 <a:solidFill>
-                  <a:srgbClr val="6D28D9"/>
+                  <a:srgbClr val="F26522"/>
                 </a:solidFill>
                 <a:latin typeface="Calibri"/>
               </a:rPr>
@@ -8750,7 +8833,7 @@
             <a:r>
               <a:rPr sz="1800">
                 <a:solidFill>
-                  <a:srgbClr val="1F2937"/>
+                  <a:srgbClr val="1F242C"/>
                 </a:solidFill>
                 <a:latin typeface="Calibri"/>
               </a:rPr>
@@ -8769,7 +8852,7 @@
             <a:r>
               <a:rPr sz="1800" b="1">
                 <a:solidFill>
-                  <a:srgbClr val="6D28D9"/>
+                  <a:srgbClr val="F26522"/>
                 </a:solidFill>
                 <a:latin typeface="Calibri"/>
               </a:rPr>
@@ -8778,7 +8861,7 @@
             <a:r>
               <a:rPr sz="1800">
                 <a:solidFill>
-                  <a:srgbClr val="1F2937"/>
+                  <a:srgbClr val="1F242C"/>
                 </a:solidFill>
                 <a:latin typeface="Calibri"/>
               </a:rPr>
@@ -8820,7 +8903,7 @@
             <a:avLst/>
           </a:prstGeom>
           <a:solidFill>
-            <a:srgbClr val="6D28D9"/>
+            <a:srgbClr val="F26522"/>
           </a:solidFill>
           <a:ln>
             <a:noFill/>
@@ -8879,7 +8962,7 @@
             <a:r>
               <a:rPr sz="1000" b="1">
                 <a:solidFill>
-                  <a:srgbClr val="6D28D9"/>
+                  <a:srgbClr val="F26522"/>
                 </a:solidFill>
                 <a:latin typeface="Calibri"/>
               </a:rPr>
@@ -8918,7 +9001,7 @@
             <a:r>
               <a:rPr sz="2800" b="1">
                 <a:solidFill>
-                  <a:srgbClr val="0B1F3A"/>
+                  <a:srgbClr val="111418"/>
                 </a:solidFill>
                 <a:latin typeface="Calibri"/>
               </a:rPr>
@@ -8942,7 +9025,7 @@
             <a:avLst/>
           </a:prstGeom>
           <a:solidFill>
-            <a:srgbClr val="0B1F3A"/>
+            <a:srgbClr val="111418"/>
           </a:solidFill>
           <a:ln>
             <a:noFill/>
@@ -9079,7 +9162,7 @@
             <a:r>
               <a:rPr sz="1000" b="1">
                 <a:solidFill>
-                  <a:srgbClr val="6D28D9"/>
+                  <a:srgbClr val="F26522"/>
                 </a:solidFill>
                 <a:latin typeface="Calibri"/>
               </a:rPr>
@@ -9105,11 +9188,11 @@
             </a:avLst>
           </a:prstGeom>
           <a:solidFill>
-            <a:srgbClr val="F7F9FC"/>
+            <a:srgbClr val="F7F7F8"/>
           </a:solidFill>
           <a:ln>
             <a:solidFill>
-              <a:srgbClr val="E2E8F0"/>
+              <a:srgbClr val="E3E6EB"/>
             </a:solidFill>
           </a:ln>
           <a:effectLst/>
@@ -9166,7 +9249,7 @@
             <a:r>
               <a:rPr sz="1200" b="1">
                 <a:solidFill>
-                  <a:srgbClr val="0B1F3A"/>
+                  <a:srgbClr val="111418"/>
                 </a:solidFill>
                 <a:latin typeface="Calibri"/>
               </a:rPr>
@@ -9236,11 +9319,11 @@
             </a:avLst>
           </a:prstGeom>
           <a:solidFill>
-            <a:srgbClr val="F7F9FC"/>
+            <a:srgbClr val="F7F7F8"/>
           </a:solidFill>
           <a:ln>
             <a:solidFill>
-              <a:srgbClr val="E2E8F0"/>
+              <a:srgbClr val="E3E6EB"/>
             </a:solidFill>
           </a:ln>
           <a:effectLst/>
@@ -9297,7 +9380,7 @@
             <a:r>
               <a:rPr sz="1200" b="1">
                 <a:solidFill>
-                  <a:srgbClr val="0B1F3A"/>
+                  <a:srgbClr val="111418"/>
                 </a:solidFill>
                 <a:latin typeface="Calibri"/>
               </a:rPr>
@@ -9367,11 +9450,11 @@
             </a:avLst>
           </a:prstGeom>
           <a:solidFill>
-            <a:srgbClr val="F7F9FC"/>
+            <a:srgbClr val="F7F7F8"/>
           </a:solidFill>
           <a:ln>
             <a:solidFill>
-              <a:srgbClr val="E2E8F0"/>
+              <a:srgbClr val="E3E6EB"/>
             </a:solidFill>
           </a:ln>
           <a:effectLst/>
@@ -9428,7 +9511,7 @@
             <a:r>
               <a:rPr sz="1200" b="1">
                 <a:solidFill>
-                  <a:srgbClr val="0B1F3A"/>
+                  <a:srgbClr val="111418"/>
                 </a:solidFill>
                 <a:latin typeface="Calibri"/>
               </a:rPr>
@@ -9498,11 +9581,11 @@
             </a:avLst>
           </a:prstGeom>
           <a:solidFill>
-            <a:srgbClr val="F7F9FC"/>
+            <a:srgbClr val="F7F7F8"/>
           </a:solidFill>
           <a:ln>
             <a:solidFill>
-              <a:srgbClr val="E2E8F0"/>
+              <a:srgbClr val="E3E6EB"/>
             </a:solidFill>
           </a:ln>
           <a:effectLst/>
@@ -9559,7 +9642,7 @@
             <a:r>
               <a:rPr sz="1200" b="1">
                 <a:solidFill>
-                  <a:srgbClr val="0B1F3A"/>
+                  <a:srgbClr val="111418"/>
                 </a:solidFill>
                 <a:latin typeface="Calibri"/>
               </a:rPr>
@@ -9629,11 +9712,11 @@
             </a:avLst>
           </a:prstGeom>
           <a:solidFill>
-            <a:srgbClr val="F7F9FC"/>
+            <a:srgbClr val="F7F7F8"/>
           </a:solidFill>
           <a:ln>
             <a:solidFill>
-              <a:srgbClr val="E2E8F0"/>
+              <a:srgbClr val="E3E6EB"/>
             </a:solidFill>
           </a:ln>
           <a:effectLst/>
@@ -9690,7 +9773,7 @@
             <a:r>
               <a:rPr sz="1200" b="1">
                 <a:solidFill>
-                  <a:srgbClr val="0B1F3A"/>
+                  <a:srgbClr val="111418"/>
                 </a:solidFill>
                 <a:latin typeface="Calibri"/>
               </a:rPr>
@@ -9760,11 +9843,11 @@
             </a:avLst>
           </a:prstGeom>
           <a:solidFill>
-            <a:srgbClr val="F7F9FC"/>
+            <a:srgbClr val="F7F7F8"/>
           </a:solidFill>
           <a:ln>
             <a:solidFill>
-              <a:srgbClr val="E2E8F0"/>
+              <a:srgbClr val="E3E6EB"/>
             </a:solidFill>
           </a:ln>
           <a:effectLst/>
@@ -9821,7 +9904,7 @@
             <a:r>
               <a:rPr sz="1200" b="1">
                 <a:solidFill>
-                  <a:srgbClr val="0B1F3A"/>
+                  <a:srgbClr val="111418"/>
                 </a:solidFill>
                 <a:latin typeface="Calibri"/>
               </a:rPr>
@@ -9895,7 +9978,7 @@
           </a:solidFill>
           <a:ln>
             <a:solidFill>
-              <a:srgbClr val="E2E8F0"/>
+              <a:srgbClr val="E3E6EB"/>
             </a:solidFill>
           </a:ln>
           <a:effectLst/>
@@ -9994,7 +10077,7 @@
             <a:r>
               <a:rPr sz="1800" b="1">
                 <a:solidFill>
-                  <a:srgbClr val="6D28D9"/>
+                  <a:srgbClr val="F26522"/>
                 </a:solidFill>
                 <a:latin typeface="Calibri"/>
               </a:rPr>
@@ -10003,7 +10086,7 @@
             <a:r>
               <a:rPr sz="1800">
                 <a:solidFill>
-                  <a:srgbClr val="1F2937"/>
+                  <a:srgbClr val="1F242C"/>
                 </a:solidFill>
                 <a:latin typeface="Calibri"/>
               </a:rPr>
@@ -10022,7 +10105,7 @@
             <a:r>
               <a:rPr sz="1800" b="1">
                 <a:solidFill>
-                  <a:srgbClr val="6D28D9"/>
+                  <a:srgbClr val="F26522"/>
                 </a:solidFill>
                 <a:latin typeface="Calibri"/>
               </a:rPr>
@@ -10031,7 +10114,7 @@
             <a:r>
               <a:rPr sz="1800">
                 <a:solidFill>
-                  <a:srgbClr val="1F2937"/>
+                  <a:srgbClr val="1F242C"/>
                 </a:solidFill>
                 <a:latin typeface="Calibri"/>
               </a:rPr>
@@ -10050,7 +10133,7 @@
             <a:r>
               <a:rPr sz="1800" b="1">
                 <a:solidFill>
-                  <a:srgbClr val="6D28D9"/>
+                  <a:srgbClr val="F26522"/>
                 </a:solidFill>
                 <a:latin typeface="Calibri"/>
               </a:rPr>
@@ -10059,7 +10142,7 @@
             <a:r>
               <a:rPr sz="1800">
                 <a:solidFill>
-                  <a:srgbClr val="1F2937"/>
+                  <a:srgbClr val="1F242C"/>
                 </a:solidFill>
                 <a:latin typeface="Calibri"/>
               </a:rPr>
@@ -10078,7 +10161,7 @@
             <a:r>
               <a:rPr sz="1800" b="1">
                 <a:solidFill>
-                  <a:srgbClr val="6D28D9"/>
+                  <a:srgbClr val="F26522"/>
                 </a:solidFill>
                 <a:latin typeface="Calibri"/>
               </a:rPr>
@@ -10087,7 +10170,7 @@
             <a:r>
               <a:rPr sz="1800">
                 <a:solidFill>
-                  <a:srgbClr val="1F2937"/>
+                  <a:srgbClr val="1F242C"/>
                 </a:solidFill>
                 <a:latin typeface="Calibri"/>
               </a:rPr>
@@ -10129,7 +10212,7 @@
             <a:avLst/>
           </a:prstGeom>
           <a:solidFill>
-            <a:srgbClr val="6D28D9"/>
+            <a:srgbClr val="F26522"/>
           </a:solidFill>
           <a:ln>
             <a:noFill/>
@@ -10188,7 +10271,7 @@
             <a:r>
               <a:rPr sz="1000" b="1">
                 <a:solidFill>
-                  <a:srgbClr val="6D28D9"/>
+                  <a:srgbClr val="F26522"/>
                 </a:solidFill>
                 <a:latin typeface="Calibri"/>
               </a:rPr>
@@ -10227,7 +10310,7 @@
             <a:r>
               <a:rPr sz="2800" b="1">
                 <a:solidFill>
-                  <a:srgbClr val="0B1F3A"/>
+                  <a:srgbClr val="111418"/>
                 </a:solidFill>
                 <a:latin typeface="Calibri"/>
               </a:rPr>
@@ -10251,7 +10334,7 @@
             <a:avLst/>
           </a:prstGeom>
           <a:solidFill>
-            <a:srgbClr val="0B1F3A"/>
+            <a:srgbClr val="111418"/>
           </a:solidFill>
           <a:ln>
             <a:noFill/>
@@ -10414,11 +10497,11 @@
             </a:avLst>
           </a:prstGeom>
           <a:solidFill>
-            <a:srgbClr val="F7F9FC"/>
+            <a:srgbClr val="F7F7F8"/>
           </a:solidFill>
           <a:ln>
             <a:solidFill>
-              <a:srgbClr val="E2E8F0"/>
+              <a:srgbClr val="E3E6EB"/>
             </a:solidFill>
           </a:ln>
           <a:effectLst/>
@@ -10460,7 +10543,7 @@
             <a:avLst/>
           </a:prstGeom>
           <a:solidFill>
-            <a:srgbClr val="6D28D9"/>
+            <a:srgbClr val="F26522"/>
           </a:solidFill>
           <a:ln>
             <a:noFill/>
@@ -10519,7 +10602,7 @@
             <a:r>
               <a:rPr sz="2000" b="1">
                 <a:solidFill>
-                  <a:srgbClr val="0B1F3A"/>
+                  <a:srgbClr val="111418"/>
                 </a:solidFill>
                 <a:latin typeface="Calibri"/>
               </a:rPr>
@@ -10558,7 +10641,7 @@
             <a:r>
               <a:rPr sz="1300" b="1">
                 <a:solidFill>
-                  <a:srgbClr val="6D28D9"/>
+                  <a:srgbClr val="F26522"/>
                 </a:solidFill>
                 <a:latin typeface="Calibri"/>
               </a:rPr>
@@ -10636,7 +10719,7 @@
             <a:r>
               <a:rPr sz="1300" b="0">
                 <a:solidFill>
-                  <a:srgbClr val="1F2937"/>
+                  <a:srgbClr val="1F242C"/>
                 </a:solidFill>
                 <a:latin typeface="Calibri"/>
               </a:rPr>
@@ -10662,11 +10745,11 @@
             </a:avLst>
           </a:prstGeom>
           <a:solidFill>
-            <a:srgbClr val="F7F9FC"/>
+            <a:srgbClr val="F7F7F8"/>
           </a:solidFill>
           <a:ln>
             <a:solidFill>
-              <a:srgbClr val="E2E8F0"/>
+              <a:srgbClr val="E3E6EB"/>
             </a:solidFill>
           </a:ln>
           <a:effectLst/>
@@ -10708,7 +10791,7 @@
             <a:avLst/>
           </a:prstGeom>
           <a:solidFill>
-            <a:srgbClr val="6D28D9"/>
+            <a:srgbClr val="F26522"/>
           </a:solidFill>
           <a:ln>
             <a:noFill/>
@@ -10767,7 +10850,7 @@
             <a:r>
               <a:rPr sz="2000" b="1">
                 <a:solidFill>
-                  <a:srgbClr val="0B1F3A"/>
+                  <a:srgbClr val="111418"/>
                 </a:solidFill>
                 <a:latin typeface="Calibri"/>
               </a:rPr>
@@ -10806,7 +10889,7 @@
             <a:r>
               <a:rPr sz="1300" b="1">
                 <a:solidFill>
-                  <a:srgbClr val="6D28D9"/>
+                  <a:srgbClr val="F26522"/>
                 </a:solidFill>
                 <a:latin typeface="Calibri"/>
               </a:rPr>
@@ -10884,7 +10967,7 @@
             <a:r>
               <a:rPr sz="1300" b="0">
                 <a:solidFill>
-                  <a:srgbClr val="1F2937"/>
+                  <a:srgbClr val="1F242C"/>
                 </a:solidFill>
                 <a:latin typeface="Calibri"/>
               </a:rPr>
@@ -10910,11 +10993,11 @@
             </a:avLst>
           </a:prstGeom>
           <a:solidFill>
-            <a:srgbClr val="F7F9FC"/>
+            <a:srgbClr val="F7F7F8"/>
           </a:solidFill>
           <a:ln>
             <a:solidFill>
-              <a:srgbClr val="E2E8F0"/>
+              <a:srgbClr val="E3E6EB"/>
             </a:solidFill>
           </a:ln>
           <a:effectLst/>
@@ -10956,7 +11039,7 @@
             <a:avLst/>
           </a:prstGeom>
           <a:solidFill>
-            <a:srgbClr val="6D28D9"/>
+            <a:srgbClr val="F26522"/>
           </a:solidFill>
           <a:ln>
             <a:noFill/>
@@ -11015,7 +11098,7 @@
             <a:r>
               <a:rPr sz="2000" b="1">
                 <a:solidFill>
-                  <a:srgbClr val="0B1F3A"/>
+                  <a:srgbClr val="111418"/>
                 </a:solidFill>
                 <a:latin typeface="Calibri"/>
               </a:rPr>
@@ -11054,7 +11137,7 @@
             <a:r>
               <a:rPr sz="1300" b="1">
                 <a:solidFill>
-                  <a:srgbClr val="6D28D9"/>
+                  <a:srgbClr val="F26522"/>
                 </a:solidFill>
                 <a:latin typeface="Calibri"/>
               </a:rPr>
@@ -11132,7 +11215,7 @@
             <a:r>
               <a:rPr sz="1300" b="0">
                 <a:solidFill>
-                  <a:srgbClr val="1F2937"/>
+                  <a:srgbClr val="1F242C"/>
                 </a:solidFill>
                 <a:latin typeface="Calibri"/>
               </a:rPr>
@@ -11158,11 +11241,11 @@
             </a:avLst>
           </a:prstGeom>
           <a:solidFill>
-            <a:srgbClr val="F7F9FC"/>
+            <a:srgbClr val="F7F7F8"/>
           </a:solidFill>
           <a:ln>
             <a:solidFill>
-              <a:srgbClr val="E2E8F0"/>
+              <a:srgbClr val="E3E6EB"/>
             </a:solidFill>
           </a:ln>
           <a:effectLst/>
@@ -11204,7 +11287,7 @@
             <a:avLst/>
           </a:prstGeom>
           <a:solidFill>
-            <a:srgbClr val="6D28D9"/>
+            <a:srgbClr val="F26522"/>
           </a:solidFill>
           <a:ln>
             <a:noFill/>
@@ -11263,7 +11346,7 @@
             <a:r>
               <a:rPr sz="2000" b="1">
                 <a:solidFill>
-                  <a:srgbClr val="0B1F3A"/>
+                  <a:srgbClr val="111418"/>
                 </a:solidFill>
                 <a:latin typeface="Calibri"/>
               </a:rPr>
@@ -11302,7 +11385,7 @@
             <a:r>
               <a:rPr sz="1300" b="1">
                 <a:solidFill>
-                  <a:srgbClr val="6D28D9"/>
+                  <a:srgbClr val="F26522"/>
                 </a:solidFill>
                 <a:latin typeface="Calibri"/>
               </a:rPr>
@@ -11380,7 +11463,7 @@
             <a:r>
               <a:rPr sz="1300" b="0">
                 <a:solidFill>
-                  <a:srgbClr val="1F2937"/>
+                  <a:srgbClr val="1F242C"/>
                 </a:solidFill>
                 <a:latin typeface="Calibri"/>
               </a:rPr>
@@ -11422,7 +11505,7 @@
             <a:avLst/>
           </a:prstGeom>
           <a:solidFill>
-            <a:srgbClr val="6D28D9"/>
+            <a:srgbClr val="F26522"/>
           </a:solidFill>
           <a:ln>
             <a:noFill/>
@@ -11481,7 +11564,7 @@
             <a:r>
               <a:rPr sz="1000" b="1">
                 <a:solidFill>
-                  <a:srgbClr val="6D28D9"/>
+                  <a:srgbClr val="F26522"/>
                 </a:solidFill>
                 <a:latin typeface="Calibri"/>
               </a:rPr>
@@ -11520,7 +11603,7 @@
             <a:r>
               <a:rPr sz="2800" b="1">
                 <a:solidFill>
-                  <a:srgbClr val="0B1F3A"/>
+                  <a:srgbClr val="111418"/>
                 </a:solidFill>
                 <a:latin typeface="Calibri"/>
               </a:rPr>
@@ -11544,7 +11627,7 @@
             <a:avLst/>
           </a:prstGeom>
           <a:solidFill>
-            <a:srgbClr val="0B1F3A"/>
+            <a:srgbClr val="111418"/>
           </a:solidFill>
           <a:ln>
             <a:noFill/>
@@ -11668,11 +11751,11 @@
             </a:avLst>
           </a:prstGeom>
           <a:solidFill>
-            <a:srgbClr val="F7F9FC"/>
+            <a:srgbClr val="F7F7F8"/>
           </a:solidFill>
           <a:ln>
             <a:solidFill>
-              <a:srgbClr val="E2E8F0"/>
+              <a:srgbClr val="E3E6EB"/>
             </a:solidFill>
           </a:ln>
           <a:effectLst/>
@@ -11729,7 +11812,7 @@
             <a:r>
               <a:rPr sz="2000" b="1">
                 <a:solidFill>
-                  <a:srgbClr val="0B1F3A"/>
+                  <a:srgbClr val="111418"/>
                 </a:solidFill>
                 <a:latin typeface="Calibri"/>
               </a:rPr>
@@ -11768,7 +11851,7 @@
             <a:r>
               <a:rPr sz="1300" b="1">
                 <a:solidFill>
-                  <a:srgbClr val="6D28D9"/>
+                  <a:srgbClr val="F26522"/>
                 </a:solidFill>
                 <a:latin typeface="Calibri"/>
               </a:rPr>
@@ -11792,7 +11875,7 @@
             <a:avLst/>
           </a:prstGeom>
           <a:solidFill>
-            <a:srgbClr val="6D28D9"/>
+            <a:srgbClr val="F26522"/>
           </a:solidFill>
           <a:ln>
             <a:noFill/>
@@ -11851,7 +11934,7 @@
             <a:r>
               <a:rPr sz="1500" b="0">
                 <a:solidFill>
-                  <a:srgbClr val="1F2937"/>
+                  <a:srgbClr val="1F242C"/>
                 </a:solidFill>
                 <a:latin typeface="Calibri"/>
               </a:rPr>
@@ -11877,11 +11960,11 @@
             </a:avLst>
           </a:prstGeom>
           <a:solidFill>
-            <a:srgbClr val="F7F9FC"/>
+            <a:srgbClr val="F7F7F8"/>
           </a:solidFill>
           <a:ln>
             <a:solidFill>
-              <a:srgbClr val="E2E8F0"/>
+              <a:srgbClr val="E3E6EB"/>
             </a:solidFill>
           </a:ln>
           <a:effectLst/>
@@ -11938,7 +12021,7 @@
             <a:r>
               <a:rPr sz="2000" b="1">
                 <a:solidFill>
-                  <a:srgbClr val="0B1F3A"/>
+                  <a:srgbClr val="111418"/>
                 </a:solidFill>
                 <a:latin typeface="Calibri"/>
               </a:rPr>
@@ -11977,7 +12060,7 @@
             <a:r>
               <a:rPr sz="1300" b="1">
                 <a:solidFill>
-                  <a:srgbClr val="6D28D9"/>
+                  <a:srgbClr val="F26522"/>
                 </a:solidFill>
                 <a:latin typeface="Calibri"/>
               </a:rPr>
@@ -12001,7 +12084,7 @@
             <a:avLst/>
           </a:prstGeom>
           <a:solidFill>
-            <a:srgbClr val="6D28D9"/>
+            <a:srgbClr val="F26522"/>
           </a:solidFill>
           <a:ln>
             <a:noFill/>
@@ -12060,7 +12143,7 @@
             <a:r>
               <a:rPr sz="1500" b="0">
                 <a:solidFill>
-                  <a:srgbClr val="1F2937"/>
+                  <a:srgbClr val="1F242C"/>
                 </a:solidFill>
                 <a:latin typeface="Calibri"/>
               </a:rPr>
@@ -12086,11 +12169,11 @@
             </a:avLst>
           </a:prstGeom>
           <a:solidFill>
-            <a:srgbClr val="F7F9FC"/>
+            <a:srgbClr val="F7F7F8"/>
           </a:solidFill>
           <a:ln>
             <a:solidFill>
-              <a:srgbClr val="E2E8F0"/>
+              <a:srgbClr val="E3E6EB"/>
             </a:solidFill>
           </a:ln>
           <a:effectLst/>
@@ -12147,7 +12230,7 @@
             <a:r>
               <a:rPr sz="2000" b="1">
                 <a:solidFill>
-                  <a:srgbClr val="0B1F3A"/>
+                  <a:srgbClr val="111418"/>
                 </a:solidFill>
                 <a:latin typeface="Calibri"/>
               </a:rPr>
@@ -12186,7 +12269,7 @@
             <a:r>
               <a:rPr sz="1300" b="1">
                 <a:solidFill>
-                  <a:srgbClr val="6D28D9"/>
+                  <a:srgbClr val="F26522"/>
                 </a:solidFill>
                 <a:latin typeface="Calibri"/>
               </a:rPr>
@@ -12210,7 +12293,7 @@
             <a:avLst/>
           </a:prstGeom>
           <a:solidFill>
-            <a:srgbClr val="6D28D9"/>
+            <a:srgbClr val="F26522"/>
           </a:solidFill>
           <a:ln>
             <a:noFill/>
@@ -12269,7 +12352,7 @@
             <a:r>
               <a:rPr sz="1500" b="0">
                 <a:solidFill>
-                  <a:srgbClr val="1F2937"/>
+                  <a:srgbClr val="1F242C"/>
                 </a:solidFill>
                 <a:latin typeface="Calibri"/>
               </a:rPr>
